--- a/docs/Modelos de ML en telecomunicaciones.pptx
+++ b/docs/Modelos de ML en telecomunicaciones.pptx
@@ -18,28 +18,29 @@
     <p:sldId id="263" r:id="rId14"/>
     <p:sldId id="264" r:id="rId15"/>
     <p:sldId id="265" r:id="rId16"/>
+    <p:sldId id="266" r:id="rId17"/>
   </p:sldIdLst>
   <p:sldSz cy="5143500" cx="9144000"/>
   <p:notesSz cx="6858000" cy="9144000"/>
   <p:embeddedFontLst>
     <p:embeddedFont>
       <p:font typeface="Nunito"/>
-      <p:regular r:id="rId17"/>
-      <p:bold r:id="rId18"/>
-      <p:italic r:id="rId19"/>
-      <p:boldItalic r:id="rId20"/>
+      <p:regular r:id="rId18"/>
+      <p:bold r:id="rId19"/>
+      <p:italic r:id="rId20"/>
+      <p:boldItalic r:id="rId21"/>
     </p:embeddedFont>
     <p:embeddedFont>
       <p:font typeface="Inter"/>
-      <p:regular r:id="rId21"/>
-      <p:bold r:id="rId22"/>
-      <p:italic r:id="rId23"/>
-      <p:boldItalic r:id="rId24"/>
+      <p:regular r:id="rId22"/>
+      <p:bold r:id="rId23"/>
+      <p:italic r:id="rId24"/>
+      <p:boldItalic r:id="rId25"/>
     </p:embeddedFont>
     <p:embeddedFont>
       <p:font typeface="Maven Pro"/>
-      <p:regular r:id="rId25"/>
-      <p:bold r:id="rId26"/>
+      <p:regular r:id="rId26"/>
+      <p:bold r:id="rId27"/>
     </p:embeddedFont>
   </p:embeddedFontLst>
   <p:defaultTextStyle>
@@ -834,7 +835,7 @@
       </p:grpSpPr>
       <p:sp>
         <p:nvSpPr>
-          <p:cNvPr id="346" name="Google Shape;346;h5347f3572d394ad8_4_89:notes"/>
+          <p:cNvPr id="346" name="Google Shape;346;h6b7a6c085a8a3ac7_3_2:notes"/>
           <p:cNvSpPr/>
           <p:nvPr>
             <p:ph idx="2" type="sldImg"/>
@@ -869,7 +870,106 @@
       </p:sp>
       <p:sp>
         <p:nvSpPr>
-          <p:cNvPr id="347" name="Google Shape;347;h5347f3572d394ad8_4_89:notes"/>
+          <p:cNvPr id="347" name="Google Shape;347;h6b7a6c085a8a3ac7_3_2:notes"/>
+          <p:cNvSpPr txBox="1"/>
+          <p:nvPr>
+            <p:ph idx="1" type="body"/>
+          </p:nvPr>
+        </p:nvSpPr>
+        <p:spPr>
+          <a:xfrm>
+            <a:off x="685800" y="4343400"/>
+            <a:ext cx="5486400" cy="4114800"/>
+          </a:xfrm>
+          <a:prstGeom prst="rect">
+            <a:avLst/>
+          </a:prstGeom>
+        </p:spPr>
+        <p:txBody>
+          <a:bodyPr anchorCtr="0" anchor="t" bIns="91425" lIns="91425" spcFirstLastPara="1" rIns="91425" wrap="square" tIns="91425">
+            <a:noAutofit/>
+          </a:bodyPr>
+          <a:lstStyle/>
+          <a:p>
+            <a:pPr indent="0" lvl="0" marL="0" rtl="0" algn="l">
+              <a:spcBef>
+                <a:spcPts val="0"/>
+              </a:spcBef>
+              <a:spcAft>
+                <a:spcPts val="0"/>
+              </a:spcAft>
+              <a:buNone/>
+            </a:pPr>
+            <a:r>
+              <a:t/>
+            </a:r>
+            <a:endParaRPr/>
+          </a:p>
+        </p:txBody>
+      </p:sp>
+    </p:spTree>
+  </p:cSld>
+  <p:clrMapOvr>
+    <a:masterClrMapping/>
+  </p:clrMapOvr>
+</p:notes>
+</file>
+
+<file path=ppt/notesSlides/notesSlide11.xml><?xml version="1.0" encoding="utf-8"?>
+<p:notes xmlns:a="http://schemas.openxmlformats.org/drawingml/2006/main" xmlns:r="http://schemas.openxmlformats.org/officeDocument/2006/relationships" xmlns:mc="http://schemas.openxmlformats.org/markup-compatibility/2006" xmlns:mv="urn:schemas-microsoft-com:mac:vml" xmlns:p="http://schemas.openxmlformats.org/presentationml/2006/main" xmlns:c="http://schemas.openxmlformats.org/drawingml/2006/chart" xmlns:dgm="http://schemas.openxmlformats.org/drawingml/2006/diagram" xmlns:o="urn:schemas-microsoft-com:office:office" xmlns:v="urn:schemas-microsoft-com:vml" xmlns:pvml="urn:schemas-microsoft-com:office:powerpoint" xmlns:com="http://schemas.openxmlformats.org/drawingml/2006/compatibility" xmlns:p14="http://schemas.microsoft.com/office/powerpoint/2010/main" xmlns:p15="http://schemas.microsoft.com/office/powerpoint/2012/main" xmlns:ahyp="http://schemas.microsoft.com/office/drawing/2018/hyperlinkcolor" showMasterPhAnim="0" showMasterSp="0">
+  <p:cSld>
+    <p:spTree>
+      <p:nvGrpSpPr>
+        <p:cNvPr id="355" name="Shape 355"/>
+        <p:cNvGrpSpPr/>
+        <p:nvPr/>
+      </p:nvGrpSpPr>
+      <p:grpSpPr>
+        <a:xfrm>
+          <a:off x="0" y="0"/>
+          <a:ext cx="0" cy="0"/>
+          <a:chOff x="0" y="0"/>
+          <a:chExt cx="0" cy="0"/>
+        </a:xfrm>
+      </p:grpSpPr>
+      <p:sp>
+        <p:nvSpPr>
+          <p:cNvPr id="356" name="Google Shape;356;h5347f3572d394ad8_4_89:notes"/>
+          <p:cNvSpPr/>
+          <p:nvPr>
+            <p:ph idx="2" type="sldImg"/>
+          </p:nvPr>
+        </p:nvSpPr>
+        <p:spPr>
+          <a:xfrm>
+            <a:off x="381300" y="685800"/>
+            <a:ext cx="6096000" cy="3429000"/>
+          </a:xfrm>
+          <a:custGeom>
+            <a:rect b="b" l="l" r="r" t="t"/>
+            <a:pathLst>
+              <a:path extrusionOk="0" h="120000" w="120000">
+                <a:moveTo>
+                  <a:pt x="0" y="0"/>
+                </a:moveTo>
+                <a:lnTo>
+                  <a:pt x="120000" y="0"/>
+                </a:lnTo>
+                <a:lnTo>
+                  <a:pt x="120000" y="120000"/>
+                </a:lnTo>
+                <a:lnTo>
+                  <a:pt x="0" y="120000"/>
+                </a:lnTo>
+                <a:close/>
+              </a:path>
+            </a:pathLst>
+          </a:custGeom>
+        </p:spPr>
+      </p:sp>
+      <p:sp>
+        <p:nvSpPr>
+          <p:cNvPr id="357" name="Google Shape;357;h5347f3572d394ad8_4_89:notes"/>
           <p:cNvSpPr txBox="1"/>
           <p:nvPr>
             <p:ph idx="1" type="body"/>
@@ -16277,6 +16377,271 @@
         </p:nvSpPr>
         <p:spPr>
           <a:xfrm>
+            <a:off x="632375" y="772725"/>
+            <a:ext cx="2553300" cy="1863300"/>
+          </a:xfrm>
+          <a:prstGeom prst="rect">
+            <a:avLst/>
+          </a:prstGeom>
+        </p:spPr>
+        <p:txBody>
+          <a:bodyPr anchorCtr="0" anchor="ctr" bIns="91425" lIns="91425" spcFirstLastPara="1" rIns="91425" wrap="square" tIns="91425">
+            <a:normAutofit/>
+          </a:bodyPr>
+          <a:lstStyle/>
+          <a:p>
+            <a:pPr indent="0" lvl="0" marL="0" rtl="0" algn="ctr">
+              <a:spcBef>
+                <a:spcPts val="0"/>
+              </a:spcBef>
+              <a:spcAft>
+                <a:spcPts val="0"/>
+              </a:spcAft>
+              <a:buNone/>
+            </a:pPr>
+            <a:r>
+              <a:rPr lang="es" sz="3000"/>
+              <a:t>Clasificación</a:t>
+            </a:r>
+            <a:endParaRPr sz="3000"/>
+          </a:p>
+        </p:txBody>
+      </p:sp>
+      <p:sp>
+        <p:nvSpPr>
+          <p:cNvPr id="350" name="Google Shape;350;p22"/>
+          <p:cNvSpPr txBox="1"/>
+          <p:nvPr>
+            <p:ph idx="1" type="body"/>
+          </p:nvPr>
+        </p:nvSpPr>
+        <p:spPr>
+          <a:xfrm>
+            <a:off x="303175" y="2885000"/>
+            <a:ext cx="3042900" cy="1111200"/>
+          </a:xfrm>
+          <a:prstGeom prst="rect">
+            <a:avLst/>
+          </a:prstGeom>
+        </p:spPr>
+        <p:txBody>
+          <a:bodyPr anchorCtr="0" anchor="t" bIns="91425" lIns="91425" spcFirstLastPara="1" rIns="91425" wrap="square" tIns="91425">
+            <a:normAutofit fontScale="70000" lnSpcReduction="10000"/>
+          </a:bodyPr>
+          <a:lstStyle/>
+          <a:p>
+            <a:pPr indent="0" lvl="0" marL="0" rtl="0" algn="ctr">
+              <a:spcBef>
+                <a:spcPts val="0"/>
+              </a:spcBef>
+              <a:spcAft>
+                <a:spcPts val="1200"/>
+              </a:spcAft>
+              <a:buNone/>
+            </a:pPr>
+            <a:r>
+              <a:rPr lang="es"/>
+              <a:t>Al maximizar el Recall (0.824), el Árbol de Decisión minimiza los falsos negativos a solo 66 casos. Para el negocio, esto es vital porque asegura detectar a la mayor cantidad de clientes en riesgo real de abandono, evitando la pérdida de ingresos al no aplicar medidas de retención a tiempo. </a:t>
+            </a:r>
+            <a:endParaRPr/>
+          </a:p>
+        </p:txBody>
+      </p:sp>
+      <p:sp>
+        <p:nvSpPr>
+          <p:cNvPr id="351" name="Google Shape;351;p22"/>
+          <p:cNvSpPr txBox="1"/>
+          <p:nvPr>
+            <p:ph type="title"/>
+          </p:nvPr>
+        </p:nvSpPr>
+        <p:spPr>
+          <a:xfrm>
+            <a:off x="3600900" y="772725"/>
+            <a:ext cx="2105400" cy="1863300"/>
+          </a:xfrm>
+          <a:prstGeom prst="rect">
+            <a:avLst/>
+          </a:prstGeom>
+        </p:spPr>
+        <p:txBody>
+          <a:bodyPr anchorCtr="0" anchor="ctr" bIns="91425" lIns="91425" spcFirstLastPara="1" rIns="91425" wrap="square" tIns="91425">
+            <a:normAutofit/>
+          </a:bodyPr>
+          <a:lstStyle/>
+          <a:p>
+            <a:pPr indent="0" lvl="0" marL="0" rtl="0" algn="ctr">
+              <a:spcBef>
+                <a:spcPts val="0"/>
+              </a:spcBef>
+              <a:spcAft>
+                <a:spcPts val="0"/>
+              </a:spcAft>
+              <a:buNone/>
+            </a:pPr>
+            <a:r>
+              <a:rPr lang="es" sz="3000"/>
+              <a:t>Regresión</a:t>
+            </a:r>
+            <a:endParaRPr sz="3000"/>
+          </a:p>
+        </p:txBody>
+      </p:sp>
+      <p:sp>
+        <p:nvSpPr>
+          <p:cNvPr id="352" name="Google Shape;352;p22"/>
+          <p:cNvSpPr txBox="1"/>
+          <p:nvPr>
+            <p:ph type="title"/>
+          </p:nvPr>
+        </p:nvSpPr>
+        <p:spPr>
+          <a:xfrm>
+            <a:off x="5862275" y="772725"/>
+            <a:ext cx="2923200" cy="1863300"/>
+          </a:xfrm>
+          <a:prstGeom prst="rect">
+            <a:avLst/>
+          </a:prstGeom>
+        </p:spPr>
+        <p:txBody>
+          <a:bodyPr anchorCtr="0" anchor="ctr" bIns="91425" lIns="91425" spcFirstLastPara="1" rIns="91425" wrap="square" tIns="91425">
+            <a:normAutofit/>
+          </a:bodyPr>
+          <a:lstStyle/>
+          <a:p>
+            <a:pPr indent="0" lvl="0" marL="0" rtl="0" algn="ctr">
+              <a:spcBef>
+                <a:spcPts val="0"/>
+              </a:spcBef>
+              <a:spcAft>
+                <a:spcPts val="0"/>
+              </a:spcAft>
+              <a:buNone/>
+            </a:pPr>
+            <a:r>
+              <a:rPr lang="es" sz="3000"/>
+              <a:t>Segmentación</a:t>
+            </a:r>
+            <a:endParaRPr sz="3000"/>
+          </a:p>
+        </p:txBody>
+      </p:sp>
+      <p:sp>
+        <p:nvSpPr>
+          <p:cNvPr id="353" name="Google Shape;353;p22"/>
+          <p:cNvSpPr txBox="1"/>
+          <p:nvPr>
+            <p:ph idx="1" type="body"/>
+          </p:nvPr>
+        </p:nvSpPr>
+        <p:spPr>
+          <a:xfrm>
+            <a:off x="3376950" y="2885000"/>
+            <a:ext cx="2553300" cy="1111200"/>
+          </a:xfrm>
+          <a:prstGeom prst="rect">
+            <a:avLst/>
+          </a:prstGeom>
+        </p:spPr>
+        <p:txBody>
+          <a:bodyPr anchorCtr="0" anchor="t" bIns="91425" lIns="91425" spcFirstLastPara="1" rIns="91425" wrap="square" tIns="91425">
+            <a:normAutofit fontScale="70000" lnSpcReduction="10000"/>
+          </a:bodyPr>
+          <a:lstStyle/>
+          <a:p>
+            <a:pPr indent="0" lvl="0" marL="0" rtl="0" algn="ctr">
+              <a:spcBef>
+                <a:spcPts val="0"/>
+              </a:spcBef>
+              <a:spcAft>
+                <a:spcPts val="1200"/>
+              </a:spcAft>
+              <a:buNone/>
+            </a:pPr>
+            <a:r>
+              <a:rPr lang="es"/>
+              <a:t>Reducir el error de predicción a 4,7 meses permite proyectar el tiempo de vida del cliente con mayor exactitud. Para el negocio, esto es clave para calcular la rentabilidad real por usuario y anticipar cuándo aplicar acciones de retención de forma preventiva.</a:t>
+            </a:r>
+            <a:endParaRPr/>
+          </a:p>
+        </p:txBody>
+      </p:sp>
+      <p:sp>
+        <p:nvSpPr>
+          <p:cNvPr id="354" name="Google Shape;354;p22"/>
+          <p:cNvSpPr txBox="1"/>
+          <p:nvPr>
+            <p:ph idx="1" type="body"/>
+          </p:nvPr>
+        </p:nvSpPr>
+        <p:spPr>
+          <a:xfrm>
+            <a:off x="5959250" y="2885000"/>
+            <a:ext cx="2553300" cy="1111200"/>
+          </a:xfrm>
+          <a:prstGeom prst="rect">
+            <a:avLst/>
+          </a:prstGeom>
+        </p:spPr>
+        <p:txBody>
+          <a:bodyPr anchorCtr="0" anchor="t" bIns="91425" lIns="91425" spcFirstLastPara="1" rIns="91425" wrap="square" tIns="91425">
+            <a:normAutofit fontScale="70000" lnSpcReduction="10000"/>
+          </a:bodyPr>
+          <a:lstStyle/>
+          <a:p>
+            <a:pPr indent="0" lvl="0" marL="0" rtl="0" algn="ctr">
+              <a:spcBef>
+                <a:spcPts val="0"/>
+              </a:spcBef>
+              <a:spcAft>
+                <a:spcPts val="1200"/>
+              </a:spcAft>
+              <a:buNone/>
+            </a:pPr>
+            <a:r>
+              <a:rPr lang="es"/>
+              <a:t>Enfocar esfuerzos de retención en el cluster 1 con estrategias destinadas a la adquisición del repertorio de servicios. Los otros dos, podrían ser considerados “seguros”, por tanto, se podrían adoptar medidas de prolongar o reforzar la fidelización con la empresa.</a:t>
+            </a:r>
+            <a:endParaRPr/>
+          </a:p>
+        </p:txBody>
+      </p:sp>
+    </p:spTree>
+  </p:cSld>
+  <p:clrMapOvr>
+    <a:masterClrMapping/>
+  </p:clrMapOvr>
+</p:sld>
+</file>
+
+<file path=ppt/slides/slide11.xml><?xml version="1.0" encoding="utf-8"?>
+<p:sld xmlns:a="http://schemas.openxmlformats.org/drawingml/2006/main" xmlns:r="http://schemas.openxmlformats.org/officeDocument/2006/relationships" xmlns:mc="http://schemas.openxmlformats.org/markup-compatibility/2006" xmlns:mv="urn:schemas-microsoft-com:mac:vml" xmlns:p="http://schemas.openxmlformats.org/presentationml/2006/main" xmlns:c="http://schemas.openxmlformats.org/drawingml/2006/chart" xmlns:dgm="http://schemas.openxmlformats.org/drawingml/2006/diagram" xmlns:o="urn:schemas-microsoft-com:office:office" xmlns:v="urn:schemas-microsoft-com:vml" xmlns:pvml="urn:schemas-microsoft-com:office:powerpoint" xmlns:com="http://schemas.openxmlformats.org/drawingml/2006/compatibility" xmlns:p14="http://schemas.microsoft.com/office/powerpoint/2010/main" xmlns:p15="http://schemas.microsoft.com/office/powerpoint/2012/main" xmlns:ahyp="http://schemas.microsoft.com/office/drawing/2018/hyperlinkcolor">
+  <p:cSld>
+    <p:spTree>
+      <p:nvGrpSpPr>
+        <p:cNvPr id="358" name="Shape 358"/>
+        <p:cNvGrpSpPr/>
+        <p:nvPr/>
+      </p:nvGrpSpPr>
+      <p:grpSpPr>
+        <a:xfrm>
+          <a:off x="0" y="0"/>
+          <a:ext cx="0" cy="0"/>
+          <a:chOff x="0" y="0"/>
+          <a:chExt cx="0" cy="0"/>
+        </a:xfrm>
+      </p:grpSpPr>
+      <p:sp>
+        <p:nvSpPr>
+          <p:cNvPr id="359" name="Google Shape;359;p23"/>
+          <p:cNvSpPr txBox="1"/>
+          <p:nvPr>
+            <p:ph type="title"/>
+          </p:nvPr>
+        </p:nvSpPr>
+        <p:spPr>
+          <a:xfrm>
             <a:off x="653850" y="184450"/>
             <a:ext cx="8222100" cy="1012800"/>
           </a:xfrm>
@@ -16309,7 +16674,7 @@
       </p:sp>
       <p:pic>
         <p:nvPicPr>
-          <p:cNvPr id="350" name="Google Shape;350;p22"/>
+          <p:cNvPr id="360" name="Google Shape;360;p23"/>
           <p:cNvPicPr preferRelativeResize="0"/>
           <p:nvPr/>
         </p:nvPicPr>
@@ -17493,8 +17858,8 @@
         </p:nvSpPr>
         <p:spPr>
           <a:xfrm>
-            <a:off x="77100" y="3354275"/>
-            <a:ext cx="4123500" cy="1227300"/>
+            <a:off x="77100" y="3250700"/>
+            <a:ext cx="4123500" cy="1640400"/>
           </a:xfrm>
           <a:prstGeom prst="rect">
             <a:avLst/>
@@ -17538,7 +17903,7 @@
             </a:pPr>
             <a:r>
               <a:rPr lang="es" sz="1200"/>
-              <a:t>Árbol de Decisión es el modelo más confiable al registrar el MAE más bajo.</a:t>
+              <a:t>Árbol de Decisión es el modelo más confiable al registrar el MAE más bajo. </a:t>
             </a:r>
             <a:endParaRPr sz="1200"/>
           </a:p>
@@ -17981,7 +18346,7 @@
         <p:spPr>
           <a:xfrm>
             <a:off x="432150" y="3661350"/>
-            <a:ext cx="7315500" cy="1112100"/>
+            <a:ext cx="8427300" cy="1112100"/>
           </a:xfrm>
           <a:prstGeom prst="rect">
             <a:avLst/>
@@ -18042,7 +18407,7 @@
             <a:tbl>
               <a:tblPr>
                 <a:noFill/>
-                <a:tableStyleId>{7872D4D2-24C5-43E7-9FE5-9016901881B1}</a:tableStyleId>
+                <a:tableStyleId>{53722BFE-1788-4BD6-A9B6-8FC50C1D2A24}</a:tableStyleId>
               </a:tblPr>
               <a:tblGrid>
                 <a:gridCol w="1539475"/>
